--- a/dglobal/TIB_DEMODAY_デザイン版_是正済_20260829.pptx
+++ b/dglobal/TIB_DEMODAY_デザイン版_是正済_20260829.pptx
@@ -6210,193 +6210,6 @@
           <a:chExt cx="0" cy="0"/>
         </a:xfrm>
       </p:grpSpPr>
-      <p:grpSp>
-        <p:nvGrpSpPr>
-          <p:cNvPr id="55" name="Google Shape;55;p14"/>
-          <p:cNvGrpSpPr/>
-          <p:nvPr/>
-        </p:nvGrpSpPr>
-        <p:grpSpPr>
-          <a:xfrm>
-            <a:off x="838200" y="571500"/>
-            <a:ext cx="3209925" cy="381000"/>
-            <a:chOff x="76200" y="0"/>
-            <a:chExt cx="3209925" cy="381000"/>
-          </a:xfrm>
-        </p:grpSpPr>
-        <p:sp>
-          <p:nvSpPr>
-            <p:cNvPr id="56" name="Google Shape;56;p14"/>
-            <p:cNvSpPr/>
-            <p:nvPr/>
-          </p:nvSpPr>
-          <p:spPr>
-            <a:xfrm>
-              <a:off x="76200" y="76200"/>
-              <a:ext cx="228600" cy="228600"/>
-            </a:xfrm>
-            <a:prstGeom prst="ellipse">
-              <a:avLst/>
-            </a:prstGeom>
-            <a:solidFill>
-              <a:srgbClr val="00A896"/>
-            </a:solidFill>
-            <a:ln>
-              <a:noFill/>
-            </a:ln>
-          </p:spPr>
-          <p:txBody>
-            <a:bodyPr anchorCtr="0" anchor="ctr" bIns="0" lIns="0" spcFirstLastPara="1" rIns="0" wrap="square" tIns="0">
-              <a:noAutofit/>
-            </a:bodyPr>
-            <a:lstStyle/>
-            <a:p>
-              <a:pPr indent="0" lvl="0" marL="0" rtl="0" algn="l">
-                <a:spcBef>
-                  <a:spcPts val="0"/>
-                </a:spcBef>
-                <a:spcAft>
-                  <a:spcPts val="0"/>
-                </a:spcAft>
-                <a:buNone/>
-              </a:pPr>
-              <a:r>
-                <a:t/>
-              </a:r>
-              <a:endParaRPr/>
-            </a:p>
-          </p:txBody>
-        </p:sp>
-        <p:sp>
-          <p:nvSpPr>
-            <p:cNvPr id="57" name="Google Shape;57;p14"/>
-            <p:cNvSpPr/>
-            <p:nvPr/>
-          </p:nvSpPr>
-          <p:spPr>
-            <a:xfrm>
-              <a:off x="190500" y="76200"/>
-              <a:ext cx="114300" cy="114300"/>
-            </a:xfrm>
-            <a:custGeom>
-              <a:rect b="b" l="l" r="r" t="t"/>
-              <a:pathLst>
-                <a:path extrusionOk="0" h="120000" w="120000">
-                  <a:moveTo>
-                    <a:pt x="0" y="0"/>
-                  </a:moveTo>
-                  <a:cubicBezTo>
-                    <a:pt x="66274" y="0"/>
-                    <a:pt x="120000" y="53726"/>
-                    <a:pt x="120000" y="120000"/>
-                  </a:cubicBezTo>
-                  <a:lnTo>
-                    <a:pt x="0" y="120000"/>
-                  </a:lnTo>
-                  <a:close/>
-                </a:path>
-              </a:pathLst>
-            </a:custGeom>
-            <a:solidFill>
-              <a:srgbClr val="0F2027"/>
-            </a:solidFill>
-            <a:ln>
-              <a:noFill/>
-            </a:ln>
-          </p:spPr>
-          <p:txBody>
-            <a:bodyPr anchorCtr="0" anchor="ctr" bIns="0" lIns="0" spcFirstLastPara="1" rIns="0" wrap="square" tIns="0">
-              <a:noAutofit/>
-            </a:bodyPr>
-            <a:lstStyle/>
-            <a:p>
-              <a:pPr indent="0" lvl="0" marL="0" rtl="0" algn="l">
-                <a:spcBef>
-                  <a:spcPts val="0"/>
-                </a:spcBef>
-                <a:spcAft>
-                  <a:spcPts val="0"/>
-                </a:spcAft>
-                <a:buNone/>
-              </a:pPr>
-              <a:r>
-                <a:t/>
-              </a:r>
-              <a:endParaRPr/>
-            </a:p>
-          </p:txBody>
-        </p:sp>
-        <p:sp>
-          <p:nvSpPr>
-            <p:cNvPr id="58" name="Google Shape;58;p14"/>
-            <p:cNvSpPr txBox="1"/>
-            <p:nvPr/>
-          </p:nvSpPr>
-          <p:spPr>
-            <a:xfrm>
-              <a:off x="428625" y="0"/>
-              <a:ext cx="2857500" cy="381000"/>
-            </a:xfrm>
-            <a:prstGeom prst="rect">
-              <a:avLst/>
-            </a:prstGeom>
-            <a:noFill/>
-            <a:ln>
-              <a:noFill/>
-            </a:ln>
-          </p:spPr>
-          <p:txBody>
-            <a:bodyPr anchorCtr="0" anchor="ctr" bIns="0" lIns="0" spcFirstLastPara="1" rIns="0" wrap="square" tIns="0">
-              <a:noAutofit/>
-            </a:bodyPr>
-            <a:lstStyle/>
-            <a:p>
-              <a:pPr indent="0" lvl="0" marL="0" rtl="0" algn="l">
-                <a:spcBef>
-                  <a:spcPts val="0"/>
-                </a:spcBef>
-                <a:spcAft>
-                  <a:spcPts val="0"/>
-                </a:spcAft>
-                <a:buNone/>
-              </a:pPr>
-              <a:r>
-                <a:rPr b="0" lang="ja" sz="1800">
-                  <a:solidFill>
-                    <a:srgbClr val="0F2027"/>
-                  </a:solidFill>
-                  <a:latin typeface="Inter ExtraBold"/>
-                  <a:ea typeface="Inter ExtraBold"/>
-                  <a:cs typeface="Inter ExtraBold"/>
-                  <a:sym typeface="Inter ExtraBold"/>
-                </a:rPr>
-                <a:t>PhaseShift</a:t>
-              </a:r>
-              <a:r>
-                <a:rPr b="0" lang="ja" sz="1800">
-                  <a:solidFill>
-                    <a:srgbClr val="1E3A5F"/>
-                  </a:solidFill>
-                  <a:latin typeface="Inter Light"/>
-                  <a:ea typeface="Inter Light"/>
-                  <a:cs typeface="Inter Light"/>
-                  <a:sym typeface="Inter Light"/>
-                </a:rPr>
-                <a:t>Tech</a:t>
-              </a:r>
-              <a:endParaRPr b="0" sz="1800">
-                <a:solidFill>
-                  <a:srgbClr val="0F2027"/>
-                </a:solidFill>
-                <a:latin typeface="Inter ExtraBold"/>
-                <a:ea typeface="Inter ExtraBold"/>
-                <a:cs typeface="Inter ExtraBold"/>
-                <a:sym typeface="Inter ExtraBold"/>
-              </a:endParaRPr>
-            </a:p>
-          </p:txBody>
-        </p:sp>
-      </p:grpSp>
       <p:sp>
         <p:nvSpPr>
           <p:cNvPr id="59" name="Google Shape;59;p14"/>
@@ -7111,6 +6924,30 @@
           </p:txBody>
         </p:sp>
       </p:grpSp>
+      <p:pic>
+        <p:nvPicPr>
+          <p:cNvPr id="74" name="Picture 73" descr="logo_trimmed.png"/>
+          <p:cNvPicPr>
+            <a:picLocks noChangeAspect="1"/>
+          </p:cNvPicPr>
+          <p:nvPr/>
+        </p:nvPicPr>
+        <p:blipFill>
+          <a:blip r:embed="rId3"/>
+          <a:stretch>
+            <a:fillRect/>
+          </a:stretch>
+        </p:blipFill>
+        <p:spPr>
+          <a:xfrm>
+            <a:off x="822960" y="502920"/>
+            <a:ext cx="1501739" cy="457200"/>
+          </a:xfrm>
+          <a:prstGeom prst="rect">
+            <a:avLst/>
+          </a:prstGeom>
+        </p:spPr>
+      </p:pic>
     </p:spTree>
   </p:cSld>
   <p:clrMapOvr>
